--- a/courses/ooad/out/Course_Session10_Output.pptx
+++ b/courses/ooad/out/Course_Session10_Output.pptx
@@ -597,7 +597,7 @@
           <a:p>
             <a:r>
               <a:rPr lang="en-US" dirty="0"/>
-              <a:t>교시9(GRASP 강의)를 아직 안 만들어 이 교시 03번 장이 정의를 짧게 재도입한다. 배분 3분.</a:t>
+              <a:t>교시9(GRASP 강의)의 원칙을 그대로 가져와 도메인만 NewPOS에서 Order로 바꿔 반복한다. 배분 3분.</a:t>
             </a:r>
             <a:endParaRPr lang="en-US" dirty="0"/>
           </a:p>
@@ -773,7 +773,7 @@
           <a:p>
             <a:r>
               <a:rPr lang="en-US" dirty="0"/>
-              <a:t>정의는 짧게만 던진다(교시9에서 정식으로 다룰 자리). 여기서는 "질문 도구"라는 프레임만 세운다. 배분 5분.</a:t>
+              <a:t>헤더 주석에만 있던 "렌즈" 설명을 실제 슬라이드로 꺼냈다(OI-3 정리 중 보완). 배분 4분.</a:t>
             </a:r>
             <a:endParaRPr lang="en-US" dirty="0"/>
           </a:p>
@@ -1845,7 +1845,7 @@
                 <a:ea typeface="맑은 고딕" pitchFamily="34" charset="-122"/>
                 <a:cs typeface="맑은 고딕" pitchFamily="34" charset="-120"/>
               </a:rPr>
-              <a:t>GRASP 개관</a:t>
+              <a:t>책임 이동의 렌즈</a:t>
             </a:r>
             <a:endParaRPr lang="en-US" sz="1400" dirty="0"/>
           </a:p>
@@ -2328,7 +2328,7 @@
         <p:spPr>
           <a:xfrm>
             <a:off x="320040" y="1325880"/>
-            <a:ext cx="8503920" cy="1003463"/>
+            <a:ext cx="8503920" cy="1259495"/>
           </a:xfrm>
           <a:prstGeom prst="rect">
             <a:avLst/>
@@ -2398,7 +2398,7 @@
                 <a:ea typeface="맑은 고딕" pitchFamily="34" charset="-122"/>
                 <a:cs typeface="맑은 고딕" pitchFamily="34" charset="-120"/>
               </a:rPr>
-              <a:t>Information Expert·Creator·Low Coupling·High Cohesion 네 원칙으로 코드 두 벌을 보고 책임이 어디로 갔는지 짚을 수 있다.</a:t>
+              <a:t>교시9에서 배운 정보 전문가(Information Expert)·창조자(Creator)·낮은 결합도(Low Coupling)·높은 응집도(High Cohesion) 네 원칙으로, 코드 두 벌을 보고 책임이 어디로 갔는지 짚을 수 있다.</a:t>
             </a:r>
             <a:endParaRPr lang="en-US" sz="1400" dirty="0"/>
           </a:p>
@@ -2412,7 +2412,7 @@
         </p:nvSpPr>
         <p:spPr>
           <a:xfrm>
-            <a:off x="594360" y="3227832"/>
+            <a:off x="594360" y="3355848"/>
             <a:ext cx="7955280" cy="1195487"/>
           </a:xfrm>
           <a:prstGeom prst="rect">
@@ -2488,7 +2488,7 @@
                 <a:ea typeface="맑은 고딕" pitchFamily="34" charset="-122"/>
                 <a:cs typeface="맑은 고딕" pitchFamily="34" charset="-120"/>
               </a:rPr>
-              <a:t>원칙 — </a:t>
+              <a:t>재적용 — </a:t>
             </a:r>
             <a:pPr algn="l" indent="0" marL="0">
               <a:spcBef>
@@ -2508,7 +2508,7 @@
                 <a:ea typeface="맑은 고딕" pitchFamily="34" charset="-122"/>
                 <a:cs typeface="맑은 고딕" pitchFamily="34" charset="-120"/>
               </a:rPr>
-              <a:t>GRASP 네 원칙의 이름과 뜻을 안다.</a:t>
+              <a:t>교시9에서 NewPOS로 배운 네 원칙을 Order로 옮겨 적용한다.</a:t>
             </a:r>
             <a:endParaRPr lang="en-US" sz="1400" dirty="0"/>
           </a:p>
@@ -3466,7 +3466,7 @@
                 <a:ea typeface="맑은 고딕" pitchFamily="34" charset="-122"/>
                 <a:cs typeface="맑은 고딕" pitchFamily="34" charset="-120"/>
               </a:rPr>
-              <a:t>03. GRASP 개관</a:t>
+              <a:t>03. 책임 이동의 렌즈</a:t>
             </a:r>
             <a:endParaRPr lang="en-US" sz="2200" dirty="0"/>
           </a:p>
@@ -3682,7 +3682,7 @@
                 <a:ea typeface="맑은 고딕" pitchFamily="34" charset="-122"/>
                 <a:cs typeface="맑은 고딕" pitchFamily="34" charset="-120"/>
               </a:rPr>
-              <a:t>책임을 어디 둘지는 네 가지 질문으로 정한다.</a:t>
+              <a:t>아키텍처는 규칙이 레이어를 넘고, OOAD는 책임이 절차에서 객체로 넘는다.</a:t>
             </a:r>
             <a:endParaRPr lang="en-US" sz="1400" dirty="0"/>
           </a:p>
@@ -3720,7 +3720,7 @@
         <p:spPr>
           <a:xfrm>
             <a:off x="320040" y="1325880"/>
-            <a:ext cx="8503920" cy="747431"/>
+            <a:ext cx="8503920" cy="1259495"/>
           </a:xfrm>
           <a:prstGeom prst="rect">
             <a:avLst/>
@@ -3753,7 +3753,7 @@
                 <a:ea typeface="맑은 고딕" pitchFamily="34" charset="-122"/>
                 <a:cs typeface="맑은 고딕" pitchFamily="34" charset="-120"/>
               </a:rPr>
-              <a:t>이 책임은 누가 맡아야 하는가?</a:t>
+              <a:t>이 교시는 교시9의 정의를 어떻게 다시 확인하는가?</a:t>
             </a:r>
             <a:endParaRPr lang="en-US" sz="1400" dirty="0"/>
           </a:p>
@@ -3773,7 +3773,7 @@
                 <a:ea typeface="맑은 고딕" pitchFamily="34" charset="-122"/>
                 <a:cs typeface="맑은 고딕" pitchFamily="34" charset="-120"/>
               </a:rPr>
-              <a:t>지도: </a:t>
+              <a:t>렌즈: </a:t>
             </a:r>
             <a:pPr algn="l" indent="0" marL="0">
               <a:spcBef>
@@ -3790,7 +3790,7 @@
                 <a:ea typeface="맑은 고딕" pitchFamily="34" charset="-122"/>
                 <a:cs typeface="맑은 고딕" pitchFamily="34" charset="-120"/>
               </a:rPr>
-              <a:t>GRASP는 책임 배치를 위한 질문 모음이다 — 정답표가 아니라 판단 도구다.</a:t>
+              <a:t>교시9의 정의를 다시 설명하지 않는다 — 대신 정보 소재 추론이라는 같은 절차를 Order 코드에서 손으로 반복한다. 렌즈는 "규칙이 어디로 이동하나"가 아니라 "책임이 절차에서 객체로 어떻게 이동하나"이다.</a:t>
             </a:r>
             <a:endParaRPr lang="en-US" sz="1400" dirty="0"/>
           </a:p>
@@ -3804,8 +3804,8 @@
         </p:nvSpPr>
         <p:spPr>
           <a:xfrm>
-            <a:off x="320040" y="3185160"/>
-            <a:ext cx="2712720" cy="1024799"/>
+            <a:off x="320040" y="3441192"/>
+            <a:ext cx="4160520" cy="1024799"/>
           </a:xfrm>
           <a:prstGeom prst="rect">
             <a:avLst/>
@@ -3829,8 +3829,8 @@
         </p:nvSpPr>
         <p:spPr>
           <a:xfrm>
-            <a:off x="320040" y="3185160"/>
-            <a:ext cx="2712720" cy="384048"/>
+            <a:off x="320040" y="3441192"/>
+            <a:ext cx="4160520" cy="384048"/>
           </a:xfrm>
           <a:prstGeom prst="rect">
             <a:avLst/>
@@ -3856,7 +3856,7 @@
                 <a:ea typeface="맑은 고딕" pitchFamily="34" charset="-122"/>
                 <a:cs typeface="맑은 고딕" pitchFamily="34" charset="-120"/>
               </a:rPr>
-              <a:t>Information Expert</a:t>
+              <a:t>아키텍처의 렌즈</a:t>
             </a:r>
             <a:endParaRPr lang="en-US" sz="1200" dirty="0"/>
           </a:p>
@@ -3870,8 +3870,8 @@
         </p:nvSpPr>
         <p:spPr>
           <a:xfrm>
-            <a:off x="320040" y="3569208"/>
-            <a:ext cx="2712720" cy="640751"/>
+            <a:off x="320040" y="3825240"/>
+            <a:ext cx="4160520" cy="640751"/>
           </a:xfrm>
           <a:prstGeom prst="rect">
             <a:avLst/>
@@ -3902,7 +3902,7 @@
                 <a:ea typeface="맑은 고딕" pitchFamily="34" charset="-122"/>
                 <a:cs typeface="맑은 고딕" pitchFamily="34" charset="-120"/>
               </a:rPr>
-              <a:t>필요한 데이터를 가진 자가 그 일을 한다.</a:t>
+              <a:t>규칙이 레이어를 가로질러 이동한다(서비스 → 도메인).</a:t>
             </a:r>
             <a:endParaRPr lang="en-US" sz="1200" dirty="0"/>
           </a:p>
@@ -3916,8 +3916,8 @@
         </p:nvSpPr>
         <p:spPr>
           <a:xfrm>
-            <a:off x="3215640" y="3185160"/>
-            <a:ext cx="2712720" cy="1024799"/>
+            <a:off x="4663440" y="3441192"/>
+            <a:ext cx="4160520" cy="1024799"/>
           </a:xfrm>
           <a:prstGeom prst="rect">
             <a:avLst/>
@@ -3941,8 +3941,8 @@
         </p:nvSpPr>
         <p:spPr>
           <a:xfrm>
-            <a:off x="3215640" y="3185160"/>
-            <a:ext cx="2712720" cy="384048"/>
+            <a:off x="4663440" y="3441192"/>
+            <a:ext cx="4160520" cy="384048"/>
           </a:xfrm>
           <a:prstGeom prst="rect">
             <a:avLst/>
@@ -3968,7 +3968,7 @@
                 <a:ea typeface="맑은 고딕" pitchFamily="34" charset="-122"/>
                 <a:cs typeface="맑은 고딕" pitchFamily="34" charset="-120"/>
               </a:rPr>
-              <a:t>Creator</a:t>
+              <a:t>OOAD의 렌즈</a:t>
             </a:r>
             <a:endParaRPr lang="en-US" sz="1200" dirty="0"/>
           </a:p>
@@ -3982,8 +3982,8 @@
         </p:nvSpPr>
         <p:spPr>
           <a:xfrm>
-            <a:off x="3215640" y="3569208"/>
-            <a:ext cx="2712720" cy="640751"/>
+            <a:off x="4663440" y="3825240"/>
+            <a:ext cx="4160520" cy="640751"/>
           </a:xfrm>
           <a:prstGeom prst="rect">
             <a:avLst/>
@@ -4014,7 +4014,7 @@
                 <a:ea typeface="맑은 고딕" pitchFamily="34" charset="-122"/>
                 <a:cs typeface="맑은 고딕" pitchFamily="34" charset="-120"/>
               </a:rPr>
-              <a:t>조립에 필요한 데이터를 가장 많이 가진 자가 생성한다.</a:t>
+              <a:t>책임이 절차에서 객체로 이동한다.</a:t>
             </a:r>
             <a:endParaRPr lang="en-US" sz="1200" dirty="0"/>
           </a:p>
@@ -4023,118 +4023,6 @@
       <p:sp>
         <p:nvSpPr>
           <p:cNvPr id="17" name="Shape 15"/>
-          <p:cNvSpPr/>
-          <p:nvPr/>
-        </p:nvSpPr>
-        <p:spPr>
-          <a:xfrm>
-            <a:off x="6111240" y="3185160"/>
-            <a:ext cx="2712720" cy="1024799"/>
-          </a:xfrm>
-          <a:prstGeom prst="rect">
-            <a:avLst/>
-          </a:prstGeom>
-          <a:solidFill>
-            <a:srgbClr val="FFFFFF"/>
-          </a:solidFill>
-          <a:ln w="15875">
-            <a:solidFill>
-              <a:srgbClr val="1B3A6B"/>
-            </a:solidFill>
-            <a:prstDash val="solid"/>
-          </a:ln>
-        </p:spPr>
-      </p:sp>
-      <p:sp>
-        <p:nvSpPr>
-          <p:cNvPr id="18" name="Text 16"/>
-          <p:cNvSpPr/>
-          <p:nvPr/>
-        </p:nvSpPr>
-        <p:spPr>
-          <a:xfrm>
-            <a:off x="6111240" y="3185160"/>
-            <a:ext cx="2712720" cy="384048"/>
-          </a:xfrm>
-          <a:prstGeom prst="rect">
-            <a:avLst/>
-          </a:prstGeom>
-          <a:solidFill>
-            <a:srgbClr val="1B3A6B"/>
-          </a:solidFill>
-          <a:ln/>
-        </p:spPr>
-        <p:txBody>
-          <a:bodyPr wrap="square" lIns="72009" tIns="72009" rIns="72009" bIns="72009" rtlCol="0" anchor="ctr"/>
-          <a:lstStyle/>
-          <a:p>
-            <a:pPr algn="ctr" indent="0" marL="0">
-              <a:buNone/>
-            </a:pPr>
-            <a:r>
-              <a:rPr lang="en-US" sz="1200" b="1" dirty="0">
-                <a:solidFill>
-                  <a:srgbClr val="FFFFFF"/>
-                </a:solidFill>
-                <a:latin typeface="맑은 고딕" pitchFamily="34" charset="0"/>
-                <a:ea typeface="맑은 고딕" pitchFamily="34" charset="-122"/>
-                <a:cs typeface="맑은 고딕" pitchFamily="34" charset="-120"/>
-              </a:rPr>
-              <a:t>Low Coupling / High Cohesion</a:t>
-            </a:r>
-            <a:endParaRPr lang="en-US" sz="1200" dirty="0"/>
-          </a:p>
-        </p:txBody>
-      </p:sp>
-      <p:sp>
-        <p:nvSpPr>
-          <p:cNvPr id="19" name="Text 17"/>
-          <p:cNvSpPr/>
-          <p:nvPr/>
-        </p:nvSpPr>
-        <p:spPr>
-          <a:xfrm>
-            <a:off x="6111240" y="3569208"/>
-            <a:ext cx="2712720" cy="640751"/>
-          </a:xfrm>
-          <a:prstGeom prst="rect">
-            <a:avLst/>
-          </a:prstGeom>
-          <a:noFill/>
-          <a:ln/>
-        </p:spPr>
-        <p:txBody>
-          <a:bodyPr wrap="square" lIns="72009" tIns="72009" rIns="72009" bIns="72009" rtlCol="0" anchor="t"/>
-          <a:lstStyle/>
-          <a:p>
-            <a:pPr marL="127000" indent="-127000">
-              <a:spcBef>
-                <a:spcPts val="300"/>
-              </a:spcBef>
-              <a:spcAft>
-                <a:spcPts val="300"/>
-              </a:spcAft>
-              <a:buSzPct val="100000"/>
-              <a:buChar char="•"/>
-            </a:pPr>
-            <a:r>
-              <a:rPr lang="en-US" sz="1200" dirty="0">
-                <a:solidFill>
-                  <a:srgbClr val="2D3748"/>
-                </a:solidFill>
-                <a:latin typeface="맑은 고딕" pitchFamily="34" charset="0"/>
-                <a:ea typeface="맑은 고딕" pitchFamily="34" charset="-122"/>
-                <a:cs typeface="맑은 고딕" pitchFamily="34" charset="-120"/>
-              </a:rPr>
-              <a:t>적게 알수록 낮은 결합, 한 가지만 하면 높은 응집.</a:t>
-            </a:r>
-            <a:endParaRPr lang="en-US" sz="1200" dirty="0"/>
-          </a:p>
-        </p:txBody>
-      </p:sp>
-      <p:sp>
-        <p:nvSpPr>
-          <p:cNvPr id="20" name="Shape 18"/>
           <p:cNvSpPr/>
           <p:nvPr/>
         </p:nvSpPr>
@@ -4157,7 +4045,7 @@
       </p:sp>
       <p:sp>
         <p:nvSpPr>
-          <p:cNvPr id="21" name="Text 19"/>
+          <p:cNvPr id="18" name="Text 16"/>
           <p:cNvSpPr/>
           <p:nvPr/>
         </p:nvSpPr>
@@ -4194,7 +4082,7 @@
                 <a:ea typeface="맑은 고딕" pitchFamily="34" charset="-122"/>
                 <a:cs typeface="맑은 고딕" pitchFamily="34" charset="-120"/>
               </a:rPr>
-              <a:t>적용:  </a:t>
+              <a:t>범위:  </a:t>
             </a:r>
             <a:pPr indent="0" marL="0">
               <a:spcBef>
@@ -4214,7 +4102,7 @@
                 <a:ea typeface="맑은 고딕" pitchFamily="34" charset="-122"/>
                 <a:cs typeface="맑은 고딕" pitchFamily="34" charset="-120"/>
               </a:rPr>
-              <a:t>다음 세 장에서 이 네 원칙을 실제 코드 두 벌씩 대조해 확인한다.</a:t>
+              <a:t>이 세 쌍은 교시9의 여섯 원칙 중 정보 전문가·창조자·낮은 결합도·높은 응집도 넷을 다룬다 — 제어자·다형성은 부3 나머지 교시에서 다룬다.</a:t>
             </a:r>
             <a:endParaRPr lang="en-US" sz="1400" dirty="0"/>
           </a:p>
@@ -4609,7 +4497,7 @@
                 <a:ea typeface="맑은 고딕" pitchFamily="34" charset="-122"/>
                 <a:cs typeface="맑은 고딕" pitchFamily="34" charset="-120"/>
               </a:rPr>
-              <a:t>Information Expert — 필요한 데이터를 가장 잘 아는 객체가 그 일을 한다.</a:t>
+              <a:t>정보 전문가(Information Expert) — 필요한 데이터를 가장 잘 아는 객체가 그 일을 한다.</a:t>
             </a:r>
             <a:endParaRPr lang="en-US" sz="1400" dirty="0"/>
           </a:p>
@@ -4884,7 +4772,7 @@
                 <a:ea typeface="맑은 고딕" pitchFamily="34" charset="-122"/>
                 <a:cs typeface="맑은 고딕" pitchFamily="34" charset="-120"/>
               </a:rPr>
-              <a:t>Information Expert </a:t>
+              <a:t>정보 전문가(Information Expert) </a:t>
             </a:r>
             <a:pPr algn="l" indent="0" marL="0">
               <a:buNone/>
@@ -5471,7 +5359,7 @@
                 <a:ea typeface="맑은 고딕" pitchFamily="34" charset="-122"/>
                 <a:cs typeface="맑은 고딕" pitchFamily="34" charset="-120"/>
               </a:rPr>
-              <a:t>Creator — Order가 자기 라인의 구성·검증 규칙을 가장 잘 안다.</a:t>
+              <a:t>창조자(Creator) — Order가 자기 라인의 구성·검증 규칙을 가장 잘 안다.</a:t>
             </a:r>
             <a:endParaRPr lang="en-US" sz="1400" dirty="0"/>
           </a:p>
@@ -5763,7 +5651,7 @@
                 <a:ea typeface="맑은 고딕" pitchFamily="34" charset="-122"/>
                 <a:cs typeface="맑은 고딕" pitchFamily="34" charset="-120"/>
               </a:rPr>
-              <a:t>Creator </a:t>
+              <a:t>창조자(Creator) </a:t>
             </a:r>
             <a:pPr algn="l" indent="0" marL="0">
               <a:buNone/>
@@ -6280,7 +6168,7 @@
         <p:spPr>
           <a:xfrm>
             <a:off x="320040" y="1325880"/>
-            <a:ext cx="8503920" cy="747431"/>
+            <a:ext cx="8503920" cy="1003463"/>
           </a:xfrm>
           <a:prstGeom prst="rect">
             <a:avLst/>
@@ -6350,7 +6238,7 @@
                 <a:ea typeface="맑은 고딕" pitchFamily="34" charset="-122"/>
                 <a:cs typeface="맑은 고딕" pitchFamily="34" charset="-120"/>
               </a:rPr>
-              <a:t>Low Coupling·High Cohesion — 적게 알수록 결합이 낮고, 한 가지만 하면 응집이 높다.</a:t>
+              <a:t>낮은 결합도(Low Coupling)·높은 응집도(High Cohesion) — 적게 알수록 결합이 낮고, 한 가지만 하면 응집이 높다.</a:t>
             </a:r>
             <a:endParaRPr lang="en-US" sz="1400" dirty="0"/>
           </a:p>
@@ -6364,7 +6252,7 @@
         </p:nvSpPr>
         <p:spPr>
           <a:xfrm>
-            <a:off x="320040" y="2919684"/>
+            <a:off x="320040" y="3047700"/>
             <a:ext cx="4160520" cy="1226566"/>
           </a:xfrm>
           <a:prstGeom prst="rect">
@@ -6389,7 +6277,7 @@
         </p:nvSpPr>
         <p:spPr>
           <a:xfrm>
-            <a:off x="320040" y="2919684"/>
+            <a:off x="320040" y="3047700"/>
             <a:ext cx="4160520" cy="256032"/>
           </a:xfrm>
           <a:prstGeom prst="rect">
@@ -6430,7 +6318,7 @@
         </p:nvSpPr>
         <p:spPr>
           <a:xfrm>
-            <a:off x="393192" y="3175716"/>
+            <a:off x="393192" y="3303732"/>
             <a:ext cx="4014216" cy="897382"/>
           </a:xfrm>
           <a:prstGeom prst="rect">
@@ -6551,7 +6439,7 @@
         </p:nvSpPr>
         <p:spPr>
           <a:xfrm>
-            <a:off x="4663440" y="2919684"/>
+            <a:off x="4663440" y="3047700"/>
             <a:ext cx="4160520" cy="1226566"/>
           </a:xfrm>
           <a:prstGeom prst="rect">
@@ -6576,7 +6464,7 @@
         </p:nvSpPr>
         <p:spPr>
           <a:xfrm>
-            <a:off x="4663440" y="2919684"/>
+            <a:off x="4663440" y="3047700"/>
             <a:ext cx="4160520" cy="256032"/>
           </a:xfrm>
           <a:prstGeom prst="rect">
@@ -6617,7 +6505,7 @@
         </p:nvSpPr>
         <p:spPr>
           <a:xfrm>
-            <a:off x="4736592" y="3175716"/>
+            <a:off x="4736592" y="3303732"/>
             <a:ext cx="4014216" cy="897382"/>
           </a:xfrm>
           <a:prstGeom prst="rect">
@@ -6642,7 +6530,7 @@
                 <a:ea typeface="맑은 고딕" pitchFamily="34" charset="-122"/>
                 <a:cs typeface="맑은 고딕" pitchFamily="34" charset="-120"/>
               </a:rPr>
-              <a:t>High Cohesion </a:t>
+              <a:t>높은 응집도(High Cohesion) </a:t>
             </a:r>
             <a:pPr algn="l" indent="0" marL="0">
               <a:buNone/>
@@ -6673,7 +6561,7 @@
                 <a:ea typeface="맑은 고딕" pitchFamily="34" charset="-122"/>
                 <a:cs typeface="맑은 고딕" pitchFamily="34" charset="-120"/>
               </a:rPr>
-              <a:t>Low Coupling </a:t>
+              <a:t>낮은 결합도(Low Coupling) </a:t>
             </a:r>
             <a:pPr algn="l" indent="0" marL="0">
               <a:buNone/>
@@ -6718,7 +6606,7 @@
         </p:nvSpPr>
         <p:spPr>
           <a:xfrm>
-            <a:off x="320040" y="4237690"/>
+            <a:off x="320040" y="4365706"/>
             <a:ext cx="8503920" cy="237744"/>
           </a:xfrm>
           <a:prstGeom prst="rect">
@@ -7278,7 +7166,7 @@
                 <a:ea typeface="맑은 고딕" pitchFamily="34" charset="-122"/>
                 <a:cs typeface="맑은 고딕" pitchFamily="34" charset="-120"/>
               </a:rPr>
-              <a:t>1. Information Expert</a:t>
+              <a:t>1. 정보 전문가(Information Expert)</a:t>
             </a:r>
             <a:endParaRPr lang="en-US" sz="1200" dirty="0"/>
           </a:p>
@@ -7389,7 +7277,7 @@
                 <a:ea typeface="맑은 고딕" pitchFamily="34" charset="-122"/>
                 <a:cs typeface="맑은 고딕" pitchFamily="34" charset="-120"/>
               </a:rPr>
-              <a:t>2. Creator</a:t>
+              <a:t>2. 창조자(Creator)</a:t>
             </a:r>
             <a:endParaRPr lang="en-US" sz="1200" dirty="0"/>
           </a:p>
@@ -7500,7 +7388,7 @@
                 <a:ea typeface="맑은 고딕" pitchFamily="34" charset="-122"/>
                 <a:cs typeface="맑은 고딕" pitchFamily="34" charset="-120"/>
               </a:rPr>
-              <a:t>3. Low Coupling·High Cohesion</a:t>
+              <a:t>3. 낮은 결합도·높은 응집도</a:t>
             </a:r>
             <a:endParaRPr lang="en-US" sz="1200" dirty="0"/>
           </a:p>
